--- a/builder/assets/reference-pages/bump-ranking.pptx
+++ b/builder/assets/reference-pages/bump-ranking.pptx
@@ -1099,7 +1099,7 @@
                   <a:srgbClr val="15375F"/>
                 </a:solidFill>
               </a:rPr>
-              <a:t>2021—2025 年五个业务线排名发生持续迁移</a:t>
+              <a:t>2021—2025 The rankings of five business lines continued to shift in 2016</a:t>
             </a:r>
           </a:p>
         </p:txBody>
@@ -1900,7 +1900,7 @@
                   <a:srgbClr val="2F6FB2"/>
                 </a:solidFill>
               </a:rPr>
-              <a:t>业务 A</a:t>
+              <a:t>business A</a:t>
             </a:r>
           </a:p>
         </p:txBody>
@@ -2056,7 +2056,7 @@
                   <a:srgbClr val="2F6FB2"/>
                 </a:solidFill>
               </a:rPr>
-              <a:t>业务 A</a:t>
+              <a:t>business A</a:t>
             </a:r>
           </a:p>
         </p:txBody>
@@ -2668,7 +2668,7 @@
                   <a:srgbClr val="E8872D"/>
                 </a:solidFill>
               </a:rPr>
-              <a:t>业务 B</a:t>
+              <a:t>business B</a:t>
             </a:r>
           </a:p>
         </p:txBody>
@@ -2824,7 +2824,7 @@
                   <a:srgbClr val="E8872D"/>
                 </a:solidFill>
               </a:rPr>
-              <a:t>业务 B</a:t>
+              <a:t>business B</a:t>
             </a:r>
           </a:p>
         </p:txBody>
@@ -3436,7 +3436,7 @@
                   <a:srgbClr val="E8872D"/>
                 </a:solidFill>
               </a:rPr>
-              <a:t>业务 C</a:t>
+              <a:t>business C</a:t>
             </a:r>
           </a:p>
         </p:txBody>
@@ -3592,7 +3592,7 @@
                   <a:srgbClr val="E8872D"/>
                 </a:solidFill>
               </a:rPr>
-              <a:t>业务 C</a:t>
+              <a:t>business C</a:t>
             </a:r>
           </a:p>
         </p:txBody>
@@ -4204,7 +4204,7 @@
                   <a:srgbClr val="E8872D"/>
                 </a:solidFill>
               </a:rPr>
-              <a:t>业务 D</a:t>
+              <a:t>business D</a:t>
             </a:r>
           </a:p>
         </p:txBody>
@@ -4360,7 +4360,7 @@
                   <a:srgbClr val="E8872D"/>
                 </a:solidFill>
               </a:rPr>
-              <a:t>业务 D</a:t>
+              <a:t>business D</a:t>
             </a:r>
           </a:p>
         </p:txBody>
@@ -4972,7 +4972,7 @@
                   <a:srgbClr val="2F6FB2"/>
                 </a:solidFill>
               </a:rPr>
-              <a:t>业务 E</a:t>
+              <a:t>business E</a:t>
             </a:r>
           </a:p>
         </p:txBody>
@@ -5128,7 +5128,7 @@
                   <a:srgbClr val="2F6FB2"/>
                 </a:solidFill>
               </a:rPr>
-              <a:t>业务 E</a:t>
+              <a:t>business E</a:t>
             </a:r>
           </a:p>
         </p:txBody>
@@ -5239,7 +5239,7 @@
       </p:sp>
       <p:sp>
         <p:nvSpPr>
-          <p:cNvPr id="88" name="关键洞察-rail">
+          <p:cNvPr id="88" name="key insights-rail">
             <a:extLst xmlns:a="http://schemas.openxmlformats.org/drawingml/2006/main">
               <a:ext uri="{FF2B5EF4-FFF2-40B4-BE49-F238E27FC236}">
                 <a16:creationId xmlns:a16="http://schemas.microsoft.com/office/drawing/2014/main" id="{21365978-F97B-4161-BBD7-F97ECB04868C}"/>
@@ -5272,7 +5272,7 @@
       </p:sp>
       <p:sp>
         <p:nvSpPr>
-          <p:cNvPr id="89" name="关键洞察-title">
+          <p:cNvPr id="89" name="key insights-title">
             <a:extLst xmlns:a="http://schemas.openxmlformats.org/drawingml/2006/main">
               <a:ext uri="{FF2B5EF4-FFF2-40B4-BE49-F238E27FC236}">
                 <a16:creationId xmlns:a16="http://schemas.microsoft.com/office/drawing/2014/main" id="{4CA49C1C-B7C2-454F-9F49-295620FA2E34}"/>
@@ -5317,14 +5317,14 @@
                   <a:srgbClr val="15375F"/>
                 </a:solidFill>
               </a:rPr>
-              <a:t>关键洞察</a:t>
-            </a:r>
-          </a:p>
-        </p:txBody>
-      </p:sp>
-      <p:sp>
-        <p:nvSpPr>
-          <p:cNvPr id="90" name="关键洞察-item-1">
+              <a:t>key insights</a:t>
+            </a:r>
+          </a:p>
+        </p:txBody>
+      </p:sp>
+      <p:sp>
+        <p:nvSpPr>
+          <p:cNvPr id="90" name="key insights-item-1">
             <a:extLst xmlns:a="http://schemas.openxmlformats.org/drawingml/2006/main">
               <a:ext uri="{FF2B5EF4-FFF2-40B4-BE49-F238E27FC236}">
                 <a16:creationId xmlns:a16="http://schemas.microsoft.com/office/drawing/2014/main" id="{67667925-E4D2-4431-B299-88CE3D1DCEB5}"/>
@@ -5373,14 +5373,14 @@
                   <a:srgbClr val="172033"/>
                 </a:solidFill>
               </a:rPr>
-              <a:t>业务 A 连续四年上升</a:t>
-            </a:r>
-          </a:p>
-        </p:txBody>
-      </p:sp>
-      <p:sp>
-        <p:nvSpPr>
-          <p:cNvPr id="91" name="关键洞察-item-2">
+              <a:t>business A Rising for four consecutive years</a:t>
+            </a:r>
+          </a:p>
+        </p:txBody>
+      </p:sp>
+      <p:sp>
+        <p:nvSpPr>
+          <p:cNvPr id="91" name="key insights-item-2">
             <a:extLst xmlns:a="http://schemas.openxmlformats.org/drawingml/2006/main">
               <a:ext uri="{FF2B5EF4-FFF2-40B4-BE49-F238E27FC236}">
                 <a16:creationId xmlns:a16="http://schemas.microsoft.com/office/drawing/2014/main" id="{EE18AC6E-A343-482D-87F5-CF46147680D8}"/>
@@ -5429,14 +5429,14 @@
                   <a:srgbClr val="172033"/>
                 </a:solidFill>
               </a:rPr>
-              <a:t>业务 E 在第二年进入第一名</a:t>
-            </a:r>
-          </a:p>
-        </p:txBody>
-      </p:sp>
-      <p:sp>
-        <p:nvSpPr>
-          <p:cNvPr id="92" name="关键洞察-item-3">
+              <a:t>business E Ranked first in the second year</a:t>
+            </a:r>
+          </a:p>
+        </p:txBody>
+      </p:sp>
+      <p:sp>
+        <p:nvSpPr>
+          <p:cNvPr id="92" name="key insights-item-3">
             <a:extLst xmlns:a="http://schemas.openxmlformats.org/drawingml/2006/main">
               <a:ext uri="{FF2B5EF4-FFF2-40B4-BE49-F238E27FC236}">
                 <a16:creationId xmlns:a16="http://schemas.microsoft.com/office/drawing/2014/main" id="{4DA59532-7D83-40DA-A8FE-F40202D4CB1D}"/>
@@ -5485,7 +5485,7 @@
                   <a:srgbClr val="172033"/>
                 </a:solidFill>
               </a:rPr>
-              <a:t>业务 D 排名持续走低</a:t>
+              <a:t>business D Ranking continues to decline</a:t>
             </a:r>
           </a:p>
         </p:txBody>
@@ -5541,7 +5541,7 @@
                   <a:srgbClr val="15375F"/>
                 </a:solidFill>
               </a:rPr>
-              <a:t>优先复制业务 A 的增长机制，并复盘业务 D 的下滑原因</a:t>
+              <a:t>Prioritize copy business A growth mechanism and review the business D Reasons for the decline</a:t>
             </a:r>
           </a:p>
         </p:txBody>
